--- a/.copilot-tracking/ppt/2026-09-18/zava-forward-cxo/slide-deck/zava-forward-cxo-initial-proposal.pptx
+++ b/.copilot-tracking/ppt/2026-09-18/zava-forward-cxo/slide-deck/zava-forward-cxo-initial-proposal.pptx
@@ -4854,8 +4854,8 @@
         </p:nvSpPr>
         <p:spPr>
           <a:xfrm>
-            <a:off x="11048695" y="109728"/>
-            <a:ext cx="960120" cy="335445"/>
+            <a:off x="11231575" y="91440"/>
+            <a:ext cx="777240" cy="271551"/>
           </a:xfrm>
           <a:prstGeom prst="rect">
             <a:avLst/>
@@ -4905,8 +4905,8 @@
         </p:blipFill>
         <p:spPr>
           <a:xfrm>
-            <a:off x="11048695" y="109728"/>
-            <a:ext cx="960120" cy="335446"/>
+            <a:off x="11231575" y="91440"/>
+            <a:ext cx="777240" cy="271551"/>
           </a:xfrm>
           <a:prstGeom prst="rect">
             <a:avLst/>
@@ -5367,8 +5367,8 @@
         </p:nvSpPr>
         <p:spPr>
           <a:xfrm>
-            <a:off x="11048695" y="109728"/>
-            <a:ext cx="960120" cy="335445"/>
+            <a:off x="11231575" y="91440"/>
+            <a:ext cx="777240" cy="271551"/>
           </a:xfrm>
           <a:prstGeom prst="rect">
             <a:avLst/>
@@ -5418,8 +5418,8 @@
         </p:blipFill>
         <p:spPr>
           <a:xfrm>
-            <a:off x="11048695" y="109728"/>
-            <a:ext cx="960120" cy="335446"/>
+            <a:off x="11231575" y="91440"/>
+            <a:ext cx="777240" cy="271551"/>
           </a:xfrm>
           <a:prstGeom prst="rect">
             <a:avLst/>
@@ -5868,8 +5868,8 @@
         </p:nvSpPr>
         <p:spPr>
           <a:xfrm>
-            <a:off x="11048695" y="109728"/>
-            <a:ext cx="960120" cy="335445"/>
+            <a:off x="11231575" y="91440"/>
+            <a:ext cx="777240" cy="271551"/>
           </a:xfrm>
           <a:prstGeom prst="rect">
             <a:avLst/>
@@ -5919,8 +5919,8 @@
         </p:blipFill>
         <p:spPr>
           <a:xfrm>
-            <a:off x="11048695" y="109728"/>
-            <a:ext cx="960120" cy="335446"/>
+            <a:off x="11231575" y="91440"/>
+            <a:ext cx="777240" cy="271551"/>
           </a:xfrm>
           <a:prstGeom prst="rect">
             <a:avLst/>
@@ -6445,8 +6445,8 @@
         </p:nvSpPr>
         <p:spPr>
           <a:xfrm>
-            <a:off x="11048695" y="109728"/>
-            <a:ext cx="960120" cy="335445"/>
+            <a:off x="11231575" y="91440"/>
+            <a:ext cx="777240" cy="271551"/>
           </a:xfrm>
           <a:prstGeom prst="rect">
             <a:avLst/>
@@ -6496,8 +6496,8 @@
         </p:blipFill>
         <p:spPr>
           <a:xfrm>
-            <a:off x="11048695" y="109728"/>
-            <a:ext cx="960120" cy="335446"/>
+            <a:off x="11231575" y="91440"/>
+            <a:ext cx="777240" cy="271551"/>
           </a:xfrm>
           <a:prstGeom prst="rect">
             <a:avLst/>
@@ -7075,8 +7075,8 @@
         </p:nvSpPr>
         <p:spPr>
           <a:xfrm>
-            <a:off x="11048695" y="109728"/>
-            <a:ext cx="960120" cy="335445"/>
+            <a:off x="11231575" y="91440"/>
+            <a:ext cx="777240" cy="271551"/>
           </a:xfrm>
           <a:prstGeom prst="rect">
             <a:avLst/>
@@ -7126,8 +7126,8 @@
         </p:blipFill>
         <p:spPr>
           <a:xfrm>
-            <a:off x="11048695" y="109728"/>
-            <a:ext cx="960120" cy="335446"/>
+            <a:off x="11231575" y="91440"/>
+            <a:ext cx="777240" cy="271551"/>
           </a:xfrm>
           <a:prstGeom prst="rect">
             <a:avLst/>
@@ -8093,8 +8093,8 @@
         </p:nvSpPr>
         <p:spPr>
           <a:xfrm>
-            <a:off x="11048695" y="109728"/>
-            <a:ext cx="960120" cy="335445"/>
+            <a:off x="11231575" y="91440"/>
+            <a:ext cx="777240" cy="271551"/>
           </a:xfrm>
           <a:prstGeom prst="rect">
             <a:avLst/>
@@ -8144,8 +8144,8 @@
         </p:blipFill>
         <p:spPr>
           <a:xfrm>
-            <a:off x="11048695" y="109728"/>
-            <a:ext cx="960120" cy="335446"/>
+            <a:off x="11231575" y="91440"/>
+            <a:ext cx="777240" cy="271551"/>
           </a:xfrm>
           <a:prstGeom prst="rect">
             <a:avLst/>
@@ -8562,8 +8562,8 @@
         </p:nvSpPr>
         <p:spPr>
           <a:xfrm>
-            <a:off x="11048695" y="109728"/>
-            <a:ext cx="960120" cy="335445"/>
+            <a:off x="11231575" y="91440"/>
+            <a:ext cx="777240" cy="271551"/>
           </a:xfrm>
           <a:prstGeom prst="rect">
             <a:avLst/>
@@ -8613,8 +8613,8 @@
         </p:blipFill>
         <p:spPr>
           <a:xfrm>
-            <a:off x="11048695" y="109728"/>
-            <a:ext cx="960120" cy="335446"/>
+            <a:off x="11231575" y="91440"/>
+            <a:ext cx="777240" cy="271551"/>
           </a:xfrm>
           <a:prstGeom prst="rect">
             <a:avLst/>
@@ -9171,8 +9171,8 @@
         </p:nvSpPr>
         <p:spPr>
           <a:xfrm>
-            <a:off x="11048695" y="109728"/>
-            <a:ext cx="960120" cy="335445"/>
+            <a:off x="11231575" y="91440"/>
+            <a:ext cx="777240" cy="271551"/>
           </a:xfrm>
           <a:prstGeom prst="rect">
             <a:avLst/>
@@ -9222,8 +9222,8 @@
         </p:blipFill>
         <p:spPr>
           <a:xfrm>
-            <a:off x="11048695" y="109728"/>
-            <a:ext cx="960120" cy="335446"/>
+            <a:off x="11231575" y="91440"/>
+            <a:ext cx="777240" cy="271551"/>
           </a:xfrm>
           <a:prstGeom prst="rect">
             <a:avLst/>
@@ -9919,8 +9919,8 @@
         </p:nvSpPr>
         <p:spPr>
           <a:xfrm>
-            <a:off x="11048695" y="109728"/>
-            <a:ext cx="960120" cy="335445"/>
+            <a:off x="11231575" y="91440"/>
+            <a:ext cx="777240" cy="271551"/>
           </a:xfrm>
           <a:prstGeom prst="rect">
             <a:avLst/>
@@ -9970,8 +9970,8 @@
         </p:blipFill>
         <p:spPr>
           <a:xfrm>
-            <a:off x="11048695" y="109728"/>
-            <a:ext cx="960120" cy="335446"/>
+            <a:off x="11231575" y="91440"/>
+            <a:ext cx="777240" cy="271551"/>
           </a:xfrm>
           <a:prstGeom prst="rect">
             <a:avLst/>
@@ -10504,8 +10504,8 @@
         </p:nvSpPr>
         <p:spPr>
           <a:xfrm>
-            <a:off x="11048695" y="109728"/>
-            <a:ext cx="960120" cy="335445"/>
+            <a:off x="11231575" y="91440"/>
+            <a:ext cx="777240" cy="271551"/>
           </a:xfrm>
           <a:prstGeom prst="rect">
             <a:avLst/>
@@ -10555,8 +10555,8 @@
         </p:blipFill>
         <p:spPr>
           <a:xfrm>
-            <a:off x="11048695" y="109728"/>
-            <a:ext cx="960120" cy="335446"/>
+            <a:off x="11231575" y="91440"/>
+            <a:ext cx="777240" cy="271551"/>
           </a:xfrm>
           <a:prstGeom prst="rect">
             <a:avLst/>
@@ -10959,8 +10959,8 @@
         </p:nvSpPr>
         <p:spPr>
           <a:xfrm>
-            <a:off x="11048695" y="109728"/>
-            <a:ext cx="960120" cy="335445"/>
+            <a:off x="11231575" y="91440"/>
+            <a:ext cx="777240" cy="271551"/>
           </a:xfrm>
           <a:prstGeom prst="rect">
             <a:avLst/>
@@ -11010,8 +11010,8 @@
         </p:blipFill>
         <p:spPr>
           <a:xfrm>
-            <a:off x="11048695" y="109728"/>
-            <a:ext cx="960120" cy="335446"/>
+            <a:off x="11231575" y="91440"/>
+            <a:ext cx="777240" cy="271551"/>
           </a:xfrm>
           <a:prstGeom prst="rect">
             <a:avLst/>
